--- a/Way Maker.pptx
+++ b/Way Maker.pptx
@@ -260,7 +260,7 @@
           <a:p>
             <a:fld id="{E759A0DE-F190-5444-87AC-4719D5F20D15}" type="datetimeFigureOut">
               <a:rPr lang="en-US" smtClean="0"/>
-              <a:t>10/8/26</a:t>
+              <a:t>10/21/26</a:t>
             </a:fld>
             <a:endParaRPr lang="en-US"/>
           </a:p>
@@ -430,7 +430,7 @@
           <a:p>
             <a:fld id="{E759A0DE-F190-5444-87AC-4719D5F20D15}" type="datetimeFigureOut">
               <a:rPr lang="en-US" smtClean="0"/>
-              <a:t>10/8/26</a:t>
+              <a:t>10/21/26</a:t>
             </a:fld>
             <a:endParaRPr lang="en-US"/>
           </a:p>
@@ -610,7 +610,7 @@
           <a:p>
             <a:fld id="{E759A0DE-F190-5444-87AC-4719D5F20D15}" type="datetimeFigureOut">
               <a:rPr lang="en-US" smtClean="0"/>
-              <a:t>10/8/26</a:t>
+              <a:t>10/21/26</a:t>
             </a:fld>
             <a:endParaRPr lang="en-US"/>
           </a:p>
@@ -780,7 +780,7 @@
           <a:p>
             <a:fld id="{E759A0DE-F190-5444-87AC-4719D5F20D15}" type="datetimeFigureOut">
               <a:rPr lang="en-US" smtClean="0"/>
-              <a:t>10/8/26</a:t>
+              <a:t>10/21/26</a:t>
             </a:fld>
             <a:endParaRPr lang="en-US"/>
           </a:p>
@@ -1026,7 +1026,7 @@
           <a:p>
             <a:fld id="{E759A0DE-F190-5444-87AC-4719D5F20D15}" type="datetimeFigureOut">
               <a:rPr lang="en-US" smtClean="0"/>
-              <a:t>10/8/26</a:t>
+              <a:t>10/21/26</a:t>
             </a:fld>
             <a:endParaRPr lang="en-US"/>
           </a:p>
@@ -1258,7 +1258,7 @@
           <a:p>
             <a:fld id="{E759A0DE-F190-5444-87AC-4719D5F20D15}" type="datetimeFigureOut">
               <a:rPr lang="en-US" smtClean="0"/>
-              <a:t>10/8/26</a:t>
+              <a:t>10/21/26</a:t>
             </a:fld>
             <a:endParaRPr lang="en-US"/>
           </a:p>
@@ -1625,7 +1625,7 @@
           <a:p>
             <a:fld id="{E759A0DE-F190-5444-87AC-4719D5F20D15}" type="datetimeFigureOut">
               <a:rPr lang="en-US" smtClean="0"/>
-              <a:t>10/8/26</a:t>
+              <a:t>10/21/26</a:t>
             </a:fld>
             <a:endParaRPr lang="en-US"/>
           </a:p>
@@ -1743,7 +1743,7 @@
           <a:p>
             <a:fld id="{E759A0DE-F190-5444-87AC-4719D5F20D15}" type="datetimeFigureOut">
               <a:rPr lang="en-US" smtClean="0"/>
-              <a:t>10/8/26</a:t>
+              <a:t>10/21/26</a:t>
             </a:fld>
             <a:endParaRPr lang="en-US"/>
           </a:p>
@@ -1838,7 +1838,7 @@
           <a:p>
             <a:fld id="{E759A0DE-F190-5444-87AC-4719D5F20D15}" type="datetimeFigureOut">
               <a:rPr lang="en-US" smtClean="0"/>
-              <a:t>10/8/26</a:t>
+              <a:t>10/21/26</a:t>
             </a:fld>
             <a:endParaRPr lang="en-US"/>
           </a:p>
@@ -2115,7 +2115,7 @@
           <a:p>
             <a:fld id="{E759A0DE-F190-5444-87AC-4719D5F20D15}" type="datetimeFigureOut">
               <a:rPr lang="en-US" smtClean="0"/>
-              <a:t>10/8/26</a:t>
+              <a:t>10/21/26</a:t>
             </a:fld>
             <a:endParaRPr lang="en-US"/>
           </a:p>
@@ -2372,7 +2372,7 @@
           <a:p>
             <a:fld id="{E759A0DE-F190-5444-87AC-4719D5F20D15}" type="datetimeFigureOut">
               <a:rPr lang="en-US" smtClean="0"/>
-              <a:t>10/8/26</a:t>
+              <a:t>10/21/26</a:t>
             </a:fld>
             <a:endParaRPr lang="en-US"/>
           </a:p>
@@ -2585,7 +2585,7 @@
           <a:p>
             <a:fld id="{E759A0DE-F190-5444-87AC-4719D5F20D15}" type="datetimeFigureOut">
               <a:rPr lang="en-US" smtClean="0"/>
-              <a:t>10/8/26</a:t>
+              <a:t>10/21/26</a:t>
             </a:fld>
             <a:endParaRPr lang="en-US"/>
           </a:p>
@@ -3143,9 +3143,7 @@
     <p:bg>
       <p:bgPr>
         <a:solidFill>
-          <a:schemeClr val="bg2">
-            <a:lumMod val="10000"/>
-          </a:schemeClr>
+          <a:schemeClr val="tx1"/>
         </a:solidFill>
         <a:effectLst/>
       </p:bgPr>
@@ -3269,9 +3267,7 @@
     <p:bg>
       <p:bgPr>
         <a:solidFill>
-          <a:schemeClr val="bg2">
-            <a:lumMod val="10000"/>
-          </a:schemeClr>
+          <a:schemeClr val="tx1"/>
         </a:solidFill>
         <a:effectLst/>
       </p:bgPr>
@@ -3407,9 +3403,7 @@
     <p:bg>
       <p:bgPr>
         <a:solidFill>
-          <a:schemeClr val="bg2">
-            <a:lumMod val="10000"/>
-          </a:schemeClr>
+          <a:schemeClr val="tx1"/>
         </a:solidFill>
         <a:effectLst/>
       </p:bgPr>
@@ -3521,9 +3515,7 @@
     <p:bg>
       <p:bgPr>
         <a:solidFill>
-          <a:schemeClr val="bg2">
-            <a:lumMod val="10000"/>
-          </a:schemeClr>
+          <a:schemeClr val="tx1"/>
         </a:solidFill>
         <a:effectLst/>
       </p:bgPr>
@@ -3647,9 +3639,7 @@
     <p:bg>
       <p:bgPr>
         <a:solidFill>
-          <a:schemeClr val="bg2">
-            <a:lumMod val="10000"/>
-          </a:schemeClr>
+          <a:schemeClr val="tx1"/>
         </a:solidFill>
         <a:effectLst/>
       </p:bgPr>
@@ -3785,9 +3775,7 @@
     <p:bg>
       <p:bgPr>
         <a:solidFill>
-          <a:schemeClr val="accent1">
-            <a:lumMod val="50000"/>
-          </a:schemeClr>
+          <a:schemeClr val="tx1"/>
         </a:solidFill>
         <a:effectLst/>
       </p:bgPr>
@@ -3899,9 +3887,7 @@
     <p:bg>
       <p:bgPr>
         <a:solidFill>
-          <a:schemeClr val="bg2">
-            <a:lumMod val="10000"/>
-          </a:schemeClr>
+          <a:schemeClr val="tx1"/>
         </a:solidFill>
         <a:effectLst/>
       </p:bgPr>
@@ -4025,9 +4011,7 @@
     <p:bg>
       <p:bgPr>
         <a:solidFill>
-          <a:schemeClr val="bg2">
-            <a:lumMod val="10000"/>
-          </a:schemeClr>
+          <a:schemeClr val="tx1"/>
         </a:solidFill>
         <a:effectLst/>
       </p:bgPr>
@@ -4163,9 +4147,7 @@
     <p:bg>
       <p:bgPr>
         <a:solidFill>
-          <a:schemeClr val="bg2">
-            <a:lumMod val="10000"/>
-          </a:schemeClr>
+          <a:schemeClr val="tx1"/>
         </a:solidFill>
         <a:effectLst/>
       </p:bgPr>
@@ -4555,9 +4537,7 @@
     <p:bg>
       <p:bgPr>
         <a:solidFill>
-          <a:schemeClr val="bg2">
-            <a:lumMod val="10000"/>
-          </a:schemeClr>
+          <a:schemeClr val="tx1"/>
         </a:solidFill>
         <a:effectLst/>
       </p:bgPr>
@@ -4681,9 +4661,7 @@
     <p:bg>
       <p:bgPr>
         <a:solidFill>
-          <a:schemeClr val="bg2">
-            <a:lumMod val="10000"/>
-          </a:schemeClr>
+          <a:schemeClr val="tx1"/>
         </a:solidFill>
         <a:effectLst/>
       </p:bgPr>
